--- a/Parking Impact Intelligence System-presentation.pptx
+++ b/Parking Impact Intelligence System-presentation.pptx
@@ -114,6 +114,11 @@
       </a:defRPr>
     </a:lvl9pPr>
   </p:defaultTextStyle>
+  <p:extLst>
+    <p:ext uri="{EFAFB233-063F-42B5-8137-9DF3F51BA10A}">
+      <p15:sldGuideLst xmlns:p15="http://schemas.microsoft.com/office/powerpoint/2012/main"/>
+    </p:ext>
+  </p:extLst>
 </p:presentation>
 </file>
 
@@ -303,7 +308,7 @@
           <a:p>
             <a:fld id="{29E80BC0-52B1-4143-8055-551D0314B14E}" type="datetimeFigureOut">
               <a:rPr lang="en-IN" smtClean="0"/>
-              <a:t>20-06-2026</a:t>
+              <a:t>21-06-2026</a:t>
             </a:fld>
             <a:endParaRPr lang="en-IN"/>
           </a:p>
@@ -578,7 +583,7 @@
           <a:p>
             <a:fld id="{29E80BC0-52B1-4143-8055-551D0314B14E}" type="datetimeFigureOut">
               <a:rPr lang="en-IN" smtClean="0"/>
-              <a:t>20-06-2026</a:t>
+              <a:t>21-06-2026</a:t>
             </a:fld>
             <a:endParaRPr lang="en-IN"/>
           </a:p>
@@ -772,7 +777,7 @@
           <a:p>
             <a:fld id="{29E80BC0-52B1-4143-8055-551D0314B14E}" type="datetimeFigureOut">
               <a:rPr lang="en-IN" smtClean="0"/>
-              <a:t>20-06-2026</a:t>
+              <a:t>21-06-2026</a:t>
             </a:fld>
             <a:endParaRPr lang="en-IN"/>
           </a:p>
@@ -1045,7 +1050,7 @@
           <a:p>
             <a:fld id="{29E80BC0-52B1-4143-8055-551D0314B14E}" type="datetimeFigureOut">
               <a:rPr lang="en-IN" smtClean="0"/>
-              <a:t>20-06-2026</a:t>
+              <a:t>21-06-2026</a:t>
             </a:fld>
             <a:endParaRPr lang="en-IN"/>
           </a:p>
@@ -1386,7 +1391,7 @@
           <a:p>
             <a:fld id="{29E80BC0-52B1-4143-8055-551D0314B14E}" type="datetimeFigureOut">
               <a:rPr lang="en-IN" smtClean="0"/>
-              <a:t>20-06-2026</a:t>
+              <a:t>21-06-2026</a:t>
             </a:fld>
             <a:endParaRPr lang="en-IN"/>
           </a:p>
@@ -2009,7 +2014,7 @@
           <a:p>
             <a:fld id="{29E80BC0-52B1-4143-8055-551D0314B14E}" type="datetimeFigureOut">
               <a:rPr lang="en-IN" smtClean="0"/>
-              <a:t>20-06-2026</a:t>
+              <a:t>21-06-2026</a:t>
             </a:fld>
             <a:endParaRPr lang="en-IN"/>
           </a:p>
@@ -2869,7 +2874,7 @@
           <a:p>
             <a:fld id="{29E80BC0-52B1-4143-8055-551D0314B14E}" type="datetimeFigureOut">
               <a:rPr lang="en-IN" smtClean="0"/>
-              <a:t>20-06-2026</a:t>
+              <a:t>21-06-2026</a:t>
             </a:fld>
             <a:endParaRPr lang="en-IN"/>
           </a:p>
@@ -3039,7 +3044,7 @@
           <a:p>
             <a:fld id="{29E80BC0-52B1-4143-8055-551D0314B14E}" type="datetimeFigureOut">
               <a:rPr lang="en-IN" smtClean="0"/>
-              <a:t>20-06-2026</a:t>
+              <a:t>21-06-2026</a:t>
             </a:fld>
             <a:endParaRPr lang="en-IN"/>
           </a:p>
@@ -3219,7 +3224,7 @@
           <a:p>
             <a:fld id="{29E80BC0-52B1-4143-8055-551D0314B14E}" type="datetimeFigureOut">
               <a:rPr lang="en-IN" smtClean="0"/>
-              <a:t>20-06-2026</a:t>
+              <a:t>21-06-2026</a:t>
             </a:fld>
             <a:endParaRPr lang="en-IN"/>
           </a:p>
@@ -3389,7 +3394,7 @@
           <a:p>
             <a:fld id="{29E80BC0-52B1-4143-8055-551D0314B14E}" type="datetimeFigureOut">
               <a:rPr lang="en-IN" smtClean="0"/>
-              <a:t>20-06-2026</a:t>
+              <a:t>21-06-2026</a:t>
             </a:fld>
             <a:endParaRPr lang="en-IN"/>
           </a:p>
@@ -3636,7 +3641,7 @@
           <a:p>
             <a:fld id="{29E80BC0-52B1-4143-8055-551D0314B14E}" type="datetimeFigureOut">
               <a:rPr lang="en-IN" smtClean="0"/>
-              <a:t>20-06-2026</a:t>
+              <a:t>21-06-2026</a:t>
             </a:fld>
             <a:endParaRPr lang="en-IN"/>
           </a:p>
@@ -3928,7 +3933,7 @@
           <a:p>
             <a:fld id="{29E80BC0-52B1-4143-8055-551D0314B14E}" type="datetimeFigureOut">
               <a:rPr lang="en-IN" smtClean="0"/>
-              <a:t>20-06-2026</a:t>
+              <a:t>21-06-2026</a:t>
             </a:fld>
             <a:endParaRPr lang="en-IN"/>
           </a:p>
@@ -4372,7 +4377,7 @@
           <a:p>
             <a:fld id="{29E80BC0-52B1-4143-8055-551D0314B14E}" type="datetimeFigureOut">
               <a:rPr lang="en-IN" smtClean="0"/>
-              <a:t>20-06-2026</a:t>
+              <a:t>21-06-2026</a:t>
             </a:fld>
             <a:endParaRPr lang="en-IN"/>
           </a:p>
@@ -4490,7 +4495,7 @@
           <a:p>
             <a:fld id="{29E80BC0-52B1-4143-8055-551D0314B14E}" type="datetimeFigureOut">
               <a:rPr lang="en-IN" smtClean="0"/>
-              <a:t>20-06-2026</a:t>
+              <a:t>21-06-2026</a:t>
             </a:fld>
             <a:endParaRPr lang="en-IN"/>
           </a:p>
@@ -4585,7 +4590,7 @@
           <a:p>
             <a:fld id="{29E80BC0-52B1-4143-8055-551D0314B14E}" type="datetimeFigureOut">
               <a:rPr lang="en-IN" smtClean="0"/>
-              <a:t>20-06-2026</a:t>
+              <a:t>21-06-2026</a:t>
             </a:fld>
             <a:endParaRPr lang="en-IN"/>
           </a:p>
@@ -4864,7 +4869,7 @@
           <a:p>
             <a:fld id="{29E80BC0-52B1-4143-8055-551D0314B14E}" type="datetimeFigureOut">
               <a:rPr lang="en-IN" smtClean="0"/>
-              <a:t>20-06-2026</a:t>
+              <a:t>21-06-2026</a:t>
             </a:fld>
             <a:endParaRPr lang="en-IN"/>
           </a:p>
@@ -5139,7 +5144,7 @@
           <a:p>
             <a:fld id="{29E80BC0-52B1-4143-8055-551D0314B14E}" type="datetimeFigureOut">
               <a:rPr lang="en-IN" smtClean="0"/>
-              <a:t>20-06-2026</a:t>
+              <a:t>21-06-2026</a:t>
             </a:fld>
             <a:endParaRPr lang="en-IN"/>
           </a:p>
@@ -5568,7 +5573,7 @@
           <a:p>
             <a:fld id="{29E80BC0-52B1-4143-8055-551D0314B14E}" type="datetimeFigureOut">
               <a:rPr lang="en-IN" smtClean="0"/>
-              <a:t>20-06-2026</a:t>
+              <a:t>21-06-2026</a:t>
             </a:fld>
             <a:endParaRPr lang="en-IN"/>
           </a:p>
@@ -6258,6 +6263,44 @@
           </a:p>
         </p:txBody>
       </p:sp>
+      <p:pic>
+        <p:nvPicPr>
+          <p:cNvPr id="2" name="Audio 1">
+            <a:hlinkClick r:id="" action="ppaction://media"/>
+            <a:extLst>
+              <a:ext uri="{FF2B5EF4-FFF2-40B4-BE49-F238E27FC236}">
+                <a16:creationId xmlns:a16="http://schemas.microsoft.com/office/drawing/2014/main" id="{615B9A2C-9D7E-4145-A90F-0460C746451E}"/>
+              </a:ext>
+            </a:extLst>
+          </p:cNvPr>
+          <p:cNvPicPr>
+            <a:picLocks noChangeAspect="1"/>
+          </p:cNvPicPr>
+          <p:nvPr>
+            <a:audioFile r:link="rId2"/>
+            <p:extLst>
+              <p:ext uri="{DAA4B4D4-6D71-4841-9C94-3DE7FCFB9230}">
+                <p14:media xmlns:p14="http://schemas.microsoft.com/office/powerpoint/2010/main" r:embed="rId1"/>
+              </p:ext>
+            </p:extLst>
+          </p:nvPr>
+        </p:nvPicPr>
+        <p:blipFill>
+          <a:blip r:embed="rId4"/>
+          <a:stretch>
+            <a:fillRect/>
+          </a:stretch>
+        </p:blipFill>
+        <p:spPr>
+          <a:xfrm>
+            <a:off x="11366500" y="6032500"/>
+            <a:ext cx="609600" cy="609600"/>
+          </a:xfrm>
+          <a:prstGeom prst="rect">
+            <a:avLst/>
+          </a:prstGeom>
+        </p:spPr>
+      </p:pic>
     </p:spTree>
     <p:extLst>
       <p:ext uri="{BB962C8B-B14F-4D97-AF65-F5344CB8AC3E}">
@@ -6268,6 +6311,101 @@
   <p:clrMapOvr>
     <a:masterClrMapping/>
   </p:clrMapOvr>
+  <mc:AlternateContent xmlns:mc="http://schemas.openxmlformats.org/markup-compatibility/2006">
+    <mc:Choice xmlns:p14="http://schemas.microsoft.com/office/powerpoint/2010/main" Requires="p14">
+      <p:transition spd="slow" p14:dur="2000" advTm="13034"/>
+    </mc:Choice>
+    <mc:Fallback>
+      <p:transition spd="slow" advTm="13034"/>
+    </mc:Fallback>
+  </mc:AlternateContent>
+  <p:timing>
+    <p:tnLst>
+      <p:par>
+        <p:cTn id="1" dur="indefinite" restart="never" nodeType="tmRoot">
+          <p:childTnLst>
+            <p:seq concurrent="1" nextAc="seek">
+              <p:cTn id="2" dur="indefinite" nodeType="mainSeq">
+                <p:childTnLst>
+                  <p:par>
+                    <p:cTn id="3" fill="hold">
+                      <p:stCondLst>
+                        <p:cond delay="indefinite"/>
+                        <p:cond evt="onBegin" delay="0">
+                          <p:tn val="2"/>
+                        </p:cond>
+                      </p:stCondLst>
+                      <p:childTnLst>
+                        <p:par>
+                          <p:cTn id="4" fill="hold">
+                            <p:stCondLst>
+                              <p:cond delay="0"/>
+                            </p:stCondLst>
+                            <p:childTnLst>
+                              <p:par>
+                                <p:cTn id="5" presetID="1" presetClass="mediacall" presetSubtype="0" fill="hold" nodeType="afterEffect">
+                                  <p:stCondLst>
+                                    <p:cond delay="0"/>
+                                  </p:stCondLst>
+                                  <p:childTnLst>
+                                    <p:cmd type="call" cmd="playFrom(0.0)">
+                                      <p:cBhvr>
+                                        <p:cTn id="6" dur="1" fill="hold"/>
+                                        <p:tgtEl>
+                                          <p:spTgt spid="2"/>
+                                        </p:tgtEl>
+                                      </p:cBhvr>
+                                    </p:cmd>
+                                  </p:childTnLst>
+                                </p:cTn>
+                              </p:par>
+                            </p:childTnLst>
+                          </p:cTn>
+                        </p:par>
+                      </p:childTnLst>
+                    </p:cTn>
+                  </p:par>
+                </p:childTnLst>
+              </p:cTn>
+              <p:prevCondLst>
+                <p:cond evt="onPrev" delay="0">
+                  <p:tgtEl>
+                    <p:sldTgt/>
+                  </p:tgtEl>
+                </p:cond>
+              </p:prevCondLst>
+              <p:nextCondLst>
+                <p:cond evt="onNext" delay="0">
+                  <p:tgtEl>
+                    <p:sldTgt/>
+                  </p:tgtEl>
+                </p:cond>
+              </p:nextCondLst>
+            </p:seq>
+            <p:audio isNarration="1">
+              <p:cMediaNode vol="80000" showWhenStopped="0">
+                <p:cTn id="7" fill="hold" display="0">
+                  <p:stCondLst>
+                    <p:cond delay="indefinite"/>
+                  </p:stCondLst>
+                  <p:endCondLst>
+                    <p:cond evt="onStopAudio" delay="0">
+                      <p:tgtEl>
+                        <p:sldTgt/>
+                      </p:tgtEl>
+                    </p:cond>
+                  </p:endCondLst>
+                </p:cTn>
+                <p:tgtEl>
+                  <p:spTgt spid="2"/>
+                </p:tgtEl>
+              </p:cMediaNode>
+            </p:audio>
+          </p:childTnLst>
+        </p:cTn>
+      </p:par>
+    </p:tnLst>
+  </p:timing>
 </p:sld>
 </file>
 
@@ -6370,6 +6508,8 @@
               <a:lnSpc>
                 <a:spcPct val="150000"/>
               </a:lnSpc>
+              <a:buFont typeface="Arial" panose="020B0604020202020204" pitchFamily="34" charset="0"/>
+              <a:buChar char="•"/>
             </a:pPr>
             <a:r>
               <a:rPr lang="en-US" dirty="0">
@@ -6384,6 +6524,8 @@
               <a:lnSpc>
                 <a:spcPct val="150000"/>
               </a:lnSpc>
+              <a:buFont typeface="Arial" panose="020B0604020202020204" pitchFamily="34" charset="0"/>
+              <a:buChar char="•"/>
             </a:pPr>
             <a:r>
               <a:rPr lang="en-US" dirty="0">
@@ -6398,6 +6540,8 @@
               <a:lnSpc>
                 <a:spcPct val="150000"/>
               </a:lnSpc>
+              <a:buFont typeface="Arial" panose="020B0604020202020204" pitchFamily="34" charset="0"/>
+              <a:buChar char="•"/>
             </a:pPr>
             <a:r>
               <a:rPr lang="en-US" dirty="0">
@@ -6412,6 +6556,8 @@
               <a:lnSpc>
                 <a:spcPct val="150000"/>
               </a:lnSpc>
+              <a:buFont typeface="Arial" panose="020B0604020202020204" pitchFamily="34" charset="0"/>
+              <a:buChar char="•"/>
             </a:pPr>
             <a:r>
               <a:rPr lang="en-US" dirty="0">
@@ -6440,8 +6586,8 @@
         </p:nvSpPr>
         <p:spPr>
           <a:xfrm>
-            <a:off x="6334543" y="2334116"/>
-            <a:ext cx="6096000" cy="2189767"/>
+            <a:off x="6334541" y="2052918"/>
+            <a:ext cx="6096000" cy="3266985"/>
           </a:xfrm>
           <a:prstGeom prst="rect">
             <a:avLst/>
@@ -6453,6 +6599,11 @@
           </a:bodyPr>
           <a:lstStyle/>
           <a:p>
+            <a:pPr>
+              <a:lnSpc>
+                <a:spcPct val="150000"/>
+              </a:lnSpc>
+            </a:pPr>
             <a:r>
               <a:rPr lang="en-US" sz="2000" b="1" dirty="0">
                 <a:latin typeface="Arial" panose="020B0604020202020204" pitchFamily="34" charset="0"/>
@@ -6460,70 +6611,163 @@
               </a:rPr>
               <a:t>Future Scope</a:t>
             </a:r>
-          </a:p>
-          <a:p>
-            <a:pPr>
+            <a:endParaRPr lang="en-US" altLang="en-US" sz="2000" dirty="0">
+              <a:latin typeface="Arial" panose="020B0604020202020204" pitchFamily="34" charset="0"/>
+            </a:endParaRPr>
+          </a:p>
+          <a:p>
+            <a:pPr marL="342900" lvl="0" indent="-342900" defTabSz="914400" eaLnBrk="0" fontAlgn="base" hangingPunct="0">
               <a:lnSpc>
                 <a:spcPct val="150000"/>
               </a:lnSpc>
+              <a:spcBef>
+                <a:spcPct val="0"/>
+              </a:spcBef>
+              <a:spcAft>
+                <a:spcPct val="0"/>
+              </a:spcAft>
+              <a:buClr>
+                <a:schemeClr val="bg2">
+                  <a:lumMod val="40000"/>
+                  <a:lumOff val="60000"/>
+                </a:schemeClr>
+              </a:buClr>
               <a:buFont typeface="Arial" panose="020B0604020202020204" pitchFamily="34" charset="0"/>
               <a:buChar char="•"/>
             </a:pPr>
             <a:r>
-              <a:rPr lang="en-US" sz="2000" dirty="0">
+              <a:rPr lang="en-US" altLang="en-US" sz="2000" dirty="0">
                 <a:latin typeface="Arial" panose="020B0604020202020204" pitchFamily="34" charset="0"/>
-                <a:cs typeface="Arial" panose="020B0604020202020204" pitchFamily="34" charset="0"/>
               </a:rPr>
-              <a:t>Real-time CCTV integration </a:t>
-            </a:r>
-          </a:p>
-          <a:p>
-            <a:pPr>
+              <a:t>Real-Time CCTV Integration </a:t>
+            </a:r>
+          </a:p>
+          <a:p>
+            <a:pPr marL="342900" lvl="0" indent="-342900" defTabSz="914400" eaLnBrk="0" fontAlgn="base" hangingPunct="0">
               <a:lnSpc>
                 <a:spcPct val="150000"/>
               </a:lnSpc>
+              <a:spcBef>
+                <a:spcPct val="0"/>
+              </a:spcBef>
+              <a:spcAft>
+                <a:spcPct val="0"/>
+              </a:spcAft>
+              <a:buClr>
+                <a:schemeClr val="bg2">
+                  <a:lumMod val="40000"/>
+                  <a:lumOff val="60000"/>
+                </a:schemeClr>
+              </a:buClr>
               <a:buFont typeface="Arial" panose="020B0604020202020204" pitchFamily="34" charset="0"/>
               <a:buChar char="•"/>
             </a:pPr>
             <a:r>
-              <a:rPr lang="en-US" sz="2000" dirty="0">
+              <a:rPr lang="en-US" altLang="en-US" sz="2000" dirty="0">
                 <a:latin typeface="Arial" panose="020B0604020202020204" pitchFamily="34" charset="0"/>
-                <a:cs typeface="Arial" panose="020B0604020202020204" pitchFamily="34" charset="0"/>
               </a:rPr>
-              <a:t>Live violation ingestion </a:t>
-            </a:r>
-          </a:p>
-          <a:p>
-            <a:pPr>
+              <a:t>Live Violation Data Ingestion </a:t>
+            </a:r>
+          </a:p>
+          <a:p>
+            <a:pPr marL="342900" lvl="0" indent="-342900" defTabSz="914400" eaLnBrk="0" fontAlgn="base" hangingPunct="0">
               <a:lnSpc>
                 <a:spcPct val="150000"/>
               </a:lnSpc>
+              <a:spcBef>
+                <a:spcPct val="0"/>
+              </a:spcBef>
+              <a:spcAft>
+                <a:spcPct val="0"/>
+              </a:spcAft>
+              <a:buClr>
+                <a:schemeClr val="bg2">
+                  <a:lumMod val="40000"/>
+                  <a:lumOff val="60000"/>
+                </a:schemeClr>
+              </a:buClr>
               <a:buFont typeface="Arial" panose="020B0604020202020204" pitchFamily="34" charset="0"/>
               <a:buChar char="•"/>
             </a:pPr>
             <a:r>
-              <a:rPr lang="en-US" sz="2000" dirty="0">
+              <a:rPr lang="en-US" altLang="en-US" sz="2000" dirty="0">
                 <a:latin typeface="Arial" panose="020B0604020202020204" pitchFamily="34" charset="0"/>
-                <a:cs typeface="Arial" panose="020B0604020202020204" pitchFamily="34" charset="0"/>
               </a:rPr>
-              <a:t>Dynamic EPI updates </a:t>
-            </a:r>
-          </a:p>
-          <a:p>
-            <a:pPr>
+              <a:t>Dynamic EPI Score Updates </a:t>
+            </a:r>
+          </a:p>
+          <a:p>
+            <a:pPr marL="342900" lvl="0" indent="-342900" defTabSz="914400" eaLnBrk="0" fontAlgn="base" hangingPunct="0">
               <a:lnSpc>
                 <a:spcPct val="150000"/>
               </a:lnSpc>
+              <a:spcBef>
+                <a:spcPct val="0"/>
+              </a:spcBef>
+              <a:spcAft>
+                <a:spcPct val="0"/>
+              </a:spcAft>
+              <a:buClr>
+                <a:schemeClr val="bg2">
+                  <a:lumMod val="40000"/>
+                  <a:lumOff val="60000"/>
+                </a:schemeClr>
+              </a:buClr>
               <a:buFont typeface="Arial" panose="020B0604020202020204" pitchFamily="34" charset="0"/>
               <a:buChar char="•"/>
             </a:pPr>
             <a:r>
-              <a:rPr lang="en-US" sz="2000" dirty="0">
+              <a:rPr lang="en-US" altLang="en-US" sz="2000" dirty="0">
                 <a:latin typeface="Arial" panose="020B0604020202020204" pitchFamily="34" charset="0"/>
-                <a:cs typeface="Arial" panose="020B0604020202020204" pitchFamily="34" charset="0"/>
               </a:rPr>
-              <a:t>Smart City integration </a:t>
-            </a:r>
+              <a:t>Automated Enforcement Alerts </a:t>
+            </a:r>
+          </a:p>
+          <a:p>
+            <a:pPr marL="342900" lvl="0" indent="-342900" defTabSz="914400" eaLnBrk="0" fontAlgn="base" hangingPunct="0">
+              <a:lnSpc>
+                <a:spcPct val="150000"/>
+              </a:lnSpc>
+              <a:spcBef>
+                <a:spcPct val="0"/>
+              </a:spcBef>
+              <a:spcAft>
+                <a:spcPct val="0"/>
+              </a:spcAft>
+              <a:buClr>
+                <a:schemeClr val="bg2">
+                  <a:lumMod val="40000"/>
+                  <a:lumOff val="60000"/>
+                </a:schemeClr>
+              </a:buClr>
+              <a:buFont typeface="Arial" panose="020B0604020202020204" pitchFamily="34" charset="0"/>
+              <a:buChar char="•"/>
+            </a:pPr>
+            <a:r>
+              <a:rPr lang="en-US" altLang="en-US" sz="2000" dirty="0">
+                <a:latin typeface="Arial" panose="020B0604020202020204" pitchFamily="34" charset="0"/>
+              </a:rPr>
+              <a:t>Smart City &amp; Traffic Control Integration </a:t>
+            </a:r>
+          </a:p>
+          <a:p>
+            <a:pPr marL="342900" indent="-342900">
+              <a:lnSpc>
+                <a:spcPct val="150000"/>
+              </a:lnSpc>
+              <a:buClr>
+                <a:schemeClr val="bg2">
+                  <a:lumMod val="40000"/>
+                  <a:lumOff val="60000"/>
+                </a:schemeClr>
+              </a:buClr>
+              <a:buFont typeface="Wingdings" panose="05000000000000000000" pitchFamily="2" charset="2"/>
+              <a:buChar char="Ø"/>
+            </a:pPr>
+            <a:endParaRPr lang="en-US" sz="2000" b="1" dirty="0">
+              <a:latin typeface="Arial" panose="020B0604020202020204" pitchFamily="34" charset="0"/>
+              <a:cs typeface="Arial" panose="020B0604020202020204" pitchFamily="34" charset="0"/>
+            </a:endParaRPr>
           </a:p>
         </p:txBody>
       </p:sp>
@@ -7282,13 +7526,13 @@
         </p:nvSpPr>
         <p:spPr>
           <a:xfrm>
-            <a:off x="874644" y="1378226"/>
-            <a:ext cx="9175210" cy="4870173"/>
+            <a:off x="6268278" y="331305"/>
+            <a:ext cx="5049079" cy="6073977"/>
           </a:xfrm>
         </p:spPr>
         <p:txBody>
           <a:bodyPr>
-            <a:normAutofit fontScale="92500" lnSpcReduction="20000"/>
+            <a:noAutofit/>
           </a:bodyPr>
           <a:lstStyle/>
           <a:p>
@@ -7296,11 +7540,11 @@
               <a:buNone/>
             </a:pPr>
             <a:r>
-              <a:rPr lang="en-IN" dirty="0">
+              <a:rPr lang="en-IN" sz="1600" dirty="0">
                 <a:latin typeface="Arial" panose="020B0604020202020204" pitchFamily="34" charset="0"/>
                 <a:cs typeface="Arial" panose="020B0604020202020204" pitchFamily="34" charset="0"/>
               </a:rPr>
-              <a:t>Violation Data</a:t>
+              <a:t>Historical Parking Violations</a:t>
             </a:r>
           </a:p>
           <a:p>
@@ -7308,7 +7552,55 @@
               <a:buNone/>
             </a:pPr>
             <a:r>
-              <a:rPr lang="en-IN" dirty="0">
+              <a:rPr lang="en-IN" sz="1600" dirty="0">
+                <a:latin typeface="Arial" panose="020B0604020202020204" pitchFamily="34" charset="0"/>
+                <a:cs typeface="Arial" panose="020B0604020202020204" pitchFamily="34" charset="0"/>
+              </a:rPr>
+              <a:t>   ↓</a:t>
+            </a:r>
+          </a:p>
+          <a:p>
+            <a:pPr marL="0" indent="0" algn="ctr">
+              <a:buNone/>
+            </a:pPr>
+            <a:r>
+              <a:rPr lang="en-IN" sz="1600" dirty="0">
+                <a:latin typeface="Arial" panose="020B0604020202020204" pitchFamily="34" charset="0"/>
+                <a:cs typeface="Arial" panose="020B0604020202020204" pitchFamily="34" charset="0"/>
+              </a:rPr>
+              <a:t>Feature Engineering</a:t>
+            </a:r>
+          </a:p>
+          <a:p>
+            <a:pPr marL="0" indent="0" algn="ctr">
+              <a:buNone/>
+            </a:pPr>
+            <a:r>
+              <a:rPr lang="en-IN" sz="1600" dirty="0">
+                <a:latin typeface="Arial" panose="020B0604020202020204" pitchFamily="34" charset="0"/>
+                <a:cs typeface="Arial" panose="020B0604020202020204" pitchFamily="34" charset="0"/>
+              </a:rPr>
+              <a:t>   ↓</a:t>
+            </a:r>
+          </a:p>
+          <a:p>
+            <a:pPr marL="0" indent="0" algn="ctr">
+              <a:buNone/>
+            </a:pPr>
+            <a:r>
+              <a:rPr lang="en-IN" sz="1600" dirty="0">
+                <a:latin typeface="Arial" panose="020B0604020202020204" pitchFamily="34" charset="0"/>
+                <a:cs typeface="Arial" panose="020B0604020202020204" pitchFamily="34" charset="0"/>
+              </a:rPr>
+              <a:t>Hotspot Detection</a:t>
+            </a:r>
+          </a:p>
+          <a:p>
+            <a:pPr marL="0" indent="0" algn="ctr">
+              <a:buNone/>
+            </a:pPr>
+            <a:r>
+              <a:rPr lang="en-IN" sz="1600" dirty="0">
                 <a:latin typeface="Arial" panose="020B0604020202020204" pitchFamily="34" charset="0"/>
                 <a:cs typeface="Arial" panose="020B0604020202020204" pitchFamily="34" charset="0"/>
               </a:rPr>
@@ -7320,11 +7612,11 @@
               <a:buNone/>
             </a:pPr>
             <a:r>
-              <a:rPr lang="en-IN" dirty="0">
+              <a:rPr lang="en-IN" sz="1600" dirty="0">
                 <a:latin typeface="Arial" panose="020B0604020202020204" pitchFamily="34" charset="0"/>
                 <a:cs typeface="Arial" panose="020B0604020202020204" pitchFamily="34" charset="0"/>
               </a:rPr>
-              <a:t>Hotspot Detection</a:t>
+              <a:t>Forecasting Engine</a:t>
             </a:r>
           </a:p>
           <a:p>
@@ -7332,7 +7624,7 @@
               <a:buNone/>
             </a:pPr>
             <a:r>
-              <a:rPr lang="en-IN" dirty="0">
+              <a:rPr lang="en-IN" sz="1600" dirty="0">
                 <a:latin typeface="Arial" panose="020B0604020202020204" pitchFamily="34" charset="0"/>
                 <a:cs typeface="Arial" panose="020B0604020202020204" pitchFamily="34" charset="0"/>
               </a:rPr>
@@ -7344,11 +7636,11 @@
               <a:buNone/>
             </a:pPr>
             <a:r>
-              <a:rPr lang="en-IN" dirty="0">
+              <a:rPr lang="en-IN" sz="1600" dirty="0">
                 <a:latin typeface="Arial" panose="020B0604020202020204" pitchFamily="34" charset="0"/>
                 <a:cs typeface="Arial" panose="020B0604020202020204" pitchFamily="34" charset="0"/>
               </a:rPr>
-              <a:t>Risk Analysis</a:t>
+              <a:t>Risk Classification</a:t>
             </a:r>
           </a:p>
           <a:p>
@@ -7356,7 +7648,7 @@
               <a:buNone/>
             </a:pPr>
             <a:r>
-              <a:rPr lang="en-IN" dirty="0">
+              <a:rPr lang="en-IN" sz="1600" dirty="0">
                 <a:latin typeface="Arial" panose="020B0604020202020204" pitchFamily="34" charset="0"/>
                 <a:cs typeface="Arial" panose="020B0604020202020204" pitchFamily="34" charset="0"/>
               </a:rPr>
@@ -7368,11 +7660,11 @@
               <a:buNone/>
             </a:pPr>
             <a:r>
-              <a:rPr lang="en-IN" dirty="0">
+              <a:rPr lang="en-IN" sz="1600" dirty="0">
                 <a:latin typeface="Arial" panose="020B0604020202020204" pitchFamily="34" charset="0"/>
                 <a:cs typeface="Arial" panose="020B0604020202020204" pitchFamily="34" charset="0"/>
               </a:rPr>
-              <a:t>Forecasting Engine</a:t>
+              <a:t>EPI Scoring</a:t>
             </a:r>
           </a:p>
           <a:p>
@@ -7380,7 +7672,7 @@
               <a:buNone/>
             </a:pPr>
             <a:r>
-              <a:rPr lang="en-IN" dirty="0">
+              <a:rPr lang="en-IN" sz="1600" dirty="0">
                 <a:latin typeface="Arial" panose="020B0604020202020204" pitchFamily="34" charset="0"/>
                 <a:cs typeface="Arial" panose="020B0604020202020204" pitchFamily="34" charset="0"/>
               </a:rPr>
@@ -7392,11 +7684,11 @@
               <a:buNone/>
             </a:pPr>
             <a:r>
-              <a:rPr lang="en-IN" dirty="0">
+              <a:rPr lang="en-IN" sz="1600" dirty="0">
                 <a:latin typeface="Arial" panose="020B0604020202020204" pitchFamily="34" charset="0"/>
                 <a:cs typeface="Arial" panose="020B0604020202020204" pitchFamily="34" charset="0"/>
               </a:rPr>
-              <a:t>EPI Calculation</a:t>
+              <a:t>Recommendation Engine</a:t>
             </a:r>
           </a:p>
           <a:p>
@@ -7404,11 +7696,11 @@
               <a:buNone/>
             </a:pPr>
             <a:r>
-              <a:rPr lang="en-IN" dirty="0">
+              <a:rPr lang="en-IN" sz="1600" dirty="0">
                 <a:latin typeface="Arial" panose="020B0604020202020204" pitchFamily="34" charset="0"/>
                 <a:cs typeface="Arial" panose="020B0604020202020204" pitchFamily="34" charset="0"/>
               </a:rPr>
-              <a:t> ↓</a:t>
+              <a:t>↓</a:t>
             </a:r>
           </a:p>
           <a:p>
@@ -7416,35 +7708,147 @@
               <a:buNone/>
             </a:pPr>
             <a:r>
-              <a:rPr lang="en-IN" dirty="0">
-                <a:latin typeface="Arial" panose="020B0604020202020204" pitchFamily="34" charset="0"/>
-                <a:cs typeface="Arial" panose="020B0604020202020204" pitchFamily="34" charset="0"/>
-              </a:rPr>
-              <a:t>Enforcement Planner</a:t>
-            </a:r>
-          </a:p>
-          <a:p>
-            <a:pPr marL="0" indent="0" algn="ctr">
-              <a:buNone/>
-            </a:pPr>
-            <a:r>
-              <a:rPr lang="en-IN" dirty="0">
-                <a:latin typeface="Arial" panose="020B0604020202020204" pitchFamily="34" charset="0"/>
-                <a:cs typeface="Arial" panose="020B0604020202020204" pitchFamily="34" charset="0"/>
-              </a:rPr>
-              <a:t>  ↓</a:t>
-            </a:r>
-          </a:p>
-          <a:p>
-            <a:pPr marL="0" indent="0" algn="ctr">
-              <a:buNone/>
-            </a:pPr>
-            <a:r>
-              <a:rPr lang="en-IN" dirty="0">
+              <a:rPr lang="en-IN" sz="1600" dirty="0">
                 <a:latin typeface="Arial" panose="020B0604020202020204" pitchFamily="34" charset="0"/>
                 <a:cs typeface="Arial" panose="020B0604020202020204" pitchFamily="34" charset="0"/>
               </a:rPr>
               <a:t>Traffic Police Dashboard</a:t>
+            </a:r>
+          </a:p>
+          <a:p>
+            <a:pPr marL="0" indent="0" algn="ctr">
+              <a:buNone/>
+            </a:pPr>
+            <a:r>
+              <a:rPr lang="en-IN" sz="1600" dirty="0">
+                <a:latin typeface="Arial" panose="020B0604020202020204" pitchFamily="34" charset="0"/>
+                <a:cs typeface="Arial" panose="020B0604020202020204" pitchFamily="34" charset="0"/>
+              </a:rPr>
+              <a:t>↓</a:t>
+            </a:r>
+          </a:p>
+          <a:p>
+            <a:pPr marL="0" indent="0" algn="ctr">
+              <a:buNone/>
+            </a:pPr>
+            <a:r>
+              <a:rPr lang="en-IN" sz="1600" dirty="0">
+                <a:latin typeface="Arial" panose="020B0604020202020204" pitchFamily="34" charset="0"/>
+                <a:cs typeface="Arial" panose="020B0604020202020204" pitchFamily="34" charset="0"/>
+              </a:rPr>
+              <a:t>Targeted Enforcement</a:t>
+            </a:r>
+          </a:p>
+        </p:txBody>
+      </p:sp>
+      <p:sp>
+        <p:nvSpPr>
+          <p:cNvPr id="4" name="Rectangle 3">
+            <a:extLst>
+              <a:ext uri="{FF2B5EF4-FFF2-40B4-BE49-F238E27FC236}">
+                <a16:creationId xmlns:a16="http://schemas.microsoft.com/office/drawing/2014/main" id="{4CC3A372-9907-49A6-A949-E802BD79C8B9}"/>
+              </a:ext>
+            </a:extLst>
+          </p:cNvPr>
+          <p:cNvSpPr/>
+          <p:nvPr/>
+        </p:nvSpPr>
+        <p:spPr>
+          <a:xfrm>
+            <a:off x="409195" y="1295444"/>
+            <a:ext cx="6096000" cy="3780522"/>
+          </a:xfrm>
+          <a:prstGeom prst="rect">
+            <a:avLst/>
+          </a:prstGeom>
+        </p:spPr>
+        <p:txBody>
+          <a:bodyPr>
+            <a:spAutoFit/>
+          </a:bodyPr>
+          <a:lstStyle/>
+          <a:p>
+            <a:pPr>
+              <a:lnSpc>
+                <a:spcPct val="150000"/>
+              </a:lnSpc>
+            </a:pPr>
+            <a:r>
+              <a:rPr lang="en-US" b="1" dirty="0">
+                <a:latin typeface="Arial" panose="020B0604020202020204" pitchFamily="34" charset="0"/>
+                <a:cs typeface="Arial" panose="020B0604020202020204" pitchFamily="34" charset="0"/>
+              </a:rPr>
+              <a:t>1. Hotspot Detection</a:t>
+            </a:r>
+          </a:p>
+          <a:p>
+            <a:pPr>
+              <a:lnSpc>
+                <a:spcPct val="150000"/>
+              </a:lnSpc>
+            </a:pPr>
+            <a:r>
+              <a:rPr lang="en-US" dirty="0">
+                <a:latin typeface="Arial" panose="020B0604020202020204" pitchFamily="34" charset="0"/>
+                <a:cs typeface="Arial" panose="020B0604020202020204" pitchFamily="34" charset="0"/>
+              </a:rPr>
+              <a:t>Analyze historical parking violation data to identify congestion-prone junctions and parking hotspots.</a:t>
+            </a:r>
+          </a:p>
+          <a:p>
+            <a:pPr>
+              <a:lnSpc>
+                <a:spcPct val="150000"/>
+              </a:lnSpc>
+            </a:pPr>
+            <a:r>
+              <a:rPr lang="en-US" b="1" dirty="0">
+                <a:latin typeface="Arial" panose="020B0604020202020204" pitchFamily="34" charset="0"/>
+                <a:cs typeface="Arial" panose="020B0604020202020204" pitchFamily="34" charset="0"/>
+              </a:rPr>
+              <a:t>2. Violation Forecasting</a:t>
+            </a:r>
+          </a:p>
+          <a:p>
+            <a:pPr>
+              <a:lnSpc>
+                <a:spcPct val="150000"/>
+              </a:lnSpc>
+            </a:pPr>
+            <a:r>
+              <a:rPr lang="en-US" dirty="0">
+                <a:latin typeface="Arial" panose="020B0604020202020204" pitchFamily="34" charset="0"/>
+                <a:cs typeface="Arial" panose="020B0604020202020204" pitchFamily="34" charset="0"/>
+              </a:rPr>
+              <a:t>Use machine learning models to predict future parking violation intensity based on location and time patterns.</a:t>
+            </a:r>
+          </a:p>
+          <a:p>
+            <a:pPr>
+              <a:lnSpc>
+                <a:spcPct val="150000"/>
+              </a:lnSpc>
+            </a:pPr>
+            <a:r>
+              <a:rPr lang="en-US" b="1" dirty="0">
+                <a:latin typeface="Arial" panose="020B0604020202020204" pitchFamily="34" charset="0"/>
+                <a:cs typeface="Arial" panose="020B0604020202020204" pitchFamily="34" charset="0"/>
+              </a:rPr>
+              <a:t>3. Enforcement Intelligence Dashboard</a:t>
+            </a:r>
+          </a:p>
+          <a:p>
+            <a:pPr>
+              <a:lnSpc>
+                <a:spcPct val="150000"/>
+              </a:lnSpc>
+            </a:pPr>
+            <a:r>
+              <a:rPr lang="en-US" dirty="0">
+                <a:latin typeface="Arial" panose="020B0604020202020204" pitchFamily="34" charset="0"/>
+                <a:cs typeface="Arial" panose="020B0604020202020204" pitchFamily="34" charset="0"/>
+              </a:rPr>
+              <a:t>Visualize hotspots, risk levels, forecasts, and enforcement recommendations through an interactive dashboard.</a:t>
             </a:r>
           </a:p>
         </p:txBody>
@@ -7497,7 +7901,7 @@
         </p:nvSpPr>
         <p:spPr>
           <a:xfrm>
-            <a:off x="531053" y="489218"/>
+            <a:off x="702366" y="144662"/>
             <a:ext cx="5949259" cy="1574808"/>
           </a:xfrm>
         </p:spPr>
@@ -7516,24 +7920,6 @@
             </a:r>
           </a:p>
         </p:txBody>
-      </p:sp>
-      <p:sp>
-        <p:nvSpPr>
-          <p:cNvPr id="3" name="Picture Placeholder 2">
-            <a:extLst>
-              <a:ext uri="{FF2B5EF4-FFF2-40B4-BE49-F238E27FC236}">
-                <a16:creationId xmlns:a16="http://schemas.microsoft.com/office/drawing/2014/main" id="{02FDB41C-B14A-4505-B559-53A86EB6D740}"/>
-              </a:ext>
-            </a:extLst>
-          </p:cNvPr>
-          <p:cNvSpPr>
-            <a:spLocks noGrp="1"/>
-          </p:cNvSpPr>
-          <p:nvPr>
-            <p:ph type="pic" idx="1"/>
-          </p:nvPr>
-        </p:nvSpPr>
-        <p:spPr/>
       </p:sp>
       <p:sp>
         <p:nvSpPr>
@@ -7553,7 +7939,7 @@
         </p:nvSpPr>
         <p:spPr>
           <a:xfrm>
-            <a:off x="887896" y="2981740"/>
+            <a:off x="543340" y="4631636"/>
             <a:ext cx="5208104" cy="2226364"/>
           </a:xfrm>
         </p:spPr>
@@ -7599,6 +7985,130 @@
           </a:p>
           <a:p>
             <a:endParaRPr lang="en-IN" dirty="0"/>
+          </a:p>
+        </p:txBody>
+      </p:sp>
+      <p:pic>
+        <p:nvPicPr>
+          <p:cNvPr id="6" name="Picture 5">
+            <a:extLst>
+              <a:ext uri="{FF2B5EF4-FFF2-40B4-BE49-F238E27FC236}">
+                <a16:creationId xmlns:a16="http://schemas.microsoft.com/office/drawing/2014/main" id="{385658BB-B8E4-4C4C-99A5-AC16937746F7}"/>
+              </a:ext>
+            </a:extLst>
+          </p:cNvPr>
+          <p:cNvPicPr>
+            <a:picLocks noChangeAspect="1"/>
+          </p:cNvPicPr>
+          <p:nvPr/>
+        </p:nvPicPr>
+        <p:blipFill>
+          <a:blip r:embed="rId2"/>
+          <a:stretch>
+            <a:fillRect/>
+          </a:stretch>
+        </p:blipFill>
+        <p:spPr>
+          <a:xfrm>
+            <a:off x="6281532" y="1881809"/>
+            <a:ext cx="5574881" cy="3673514"/>
+          </a:xfrm>
+          <a:prstGeom prst="rect">
+            <a:avLst/>
+          </a:prstGeom>
+        </p:spPr>
+      </p:pic>
+      <p:sp>
+        <p:nvSpPr>
+          <p:cNvPr id="7" name="Rectangle 6">
+            <a:extLst>
+              <a:ext uri="{FF2B5EF4-FFF2-40B4-BE49-F238E27FC236}">
+                <a16:creationId xmlns:a16="http://schemas.microsoft.com/office/drawing/2014/main" id="{C9E3DB9A-A520-495B-8318-1E603F6516F3}"/>
+              </a:ext>
+            </a:extLst>
+          </p:cNvPr>
+          <p:cNvSpPr/>
+          <p:nvPr/>
+        </p:nvSpPr>
+        <p:spPr>
+          <a:xfrm>
+            <a:off x="543340" y="1881809"/>
+            <a:ext cx="5208104" cy="2534027"/>
+          </a:xfrm>
+          <a:prstGeom prst="rect">
+            <a:avLst/>
+          </a:prstGeom>
+        </p:spPr>
+        <p:txBody>
+          <a:bodyPr wrap="square">
+            <a:spAutoFit/>
+          </a:bodyPr>
+          <a:lstStyle/>
+          <a:p>
+            <a:pPr>
+              <a:lnSpc>
+                <a:spcPct val="150000"/>
+              </a:lnSpc>
+              <a:buClr>
+                <a:schemeClr val="bg2">
+                  <a:lumMod val="60000"/>
+                  <a:lumOff val="40000"/>
+                </a:schemeClr>
+              </a:buClr>
+              <a:buFont typeface="Arial" panose="020B0604020202020204" pitchFamily="34" charset="0"/>
+              <a:buChar char="•"/>
+            </a:pPr>
+            <a:r>
+              <a:rPr lang="en-US" dirty="0">
+                <a:latin typeface="Arial" panose="020B0604020202020204" pitchFamily="34" charset="0"/>
+                <a:cs typeface="Arial" panose="020B0604020202020204" pitchFamily="34" charset="0"/>
+              </a:rPr>
+              <a:t> Visualizes the spatial distribution of historical parking violations across Bengaluru. </a:t>
+            </a:r>
+          </a:p>
+          <a:p>
+            <a:pPr>
+              <a:lnSpc>
+                <a:spcPct val="150000"/>
+              </a:lnSpc>
+              <a:buClr>
+                <a:schemeClr val="bg2">
+                  <a:lumMod val="60000"/>
+                  <a:lumOff val="40000"/>
+                </a:schemeClr>
+              </a:buClr>
+              <a:buFont typeface="Arial" panose="020B0604020202020204" pitchFamily="34" charset="0"/>
+              <a:buChar char="•"/>
+            </a:pPr>
+            <a:r>
+              <a:rPr lang="en-US" dirty="0">
+                <a:latin typeface="Arial" panose="020B0604020202020204" pitchFamily="34" charset="0"/>
+                <a:cs typeface="Arial" panose="020B0604020202020204" pitchFamily="34" charset="0"/>
+              </a:rPr>
+              <a:t> Highlights areas with consistently high violation density and congestion potential. </a:t>
+            </a:r>
+          </a:p>
+          <a:p>
+            <a:pPr>
+              <a:lnSpc>
+                <a:spcPct val="150000"/>
+              </a:lnSpc>
+              <a:buClr>
+                <a:schemeClr val="bg2">
+                  <a:lumMod val="60000"/>
+                  <a:lumOff val="40000"/>
+                </a:schemeClr>
+              </a:buClr>
+              <a:buFont typeface="Arial" panose="020B0604020202020204" pitchFamily="34" charset="0"/>
+              <a:buChar char="•"/>
+            </a:pPr>
+            <a:r>
+              <a:rPr lang="en-US" dirty="0">
+                <a:latin typeface="Arial" panose="020B0604020202020204" pitchFamily="34" charset="0"/>
+                <a:cs typeface="Arial" panose="020B0604020202020204" pitchFamily="34" charset="0"/>
+              </a:rPr>
+              <a:t> Serves as the foundation for hotspot detection, risk analysis, and enforcement planning. </a:t>
+            </a:r>
           </a:p>
         </p:txBody>
       </p:sp>
@@ -7829,10 +8339,10 @@
       </p:sp>
       <p:pic>
         <p:nvPicPr>
-          <p:cNvPr id="6" name="Picture 5">
+          <p:cNvPr id="3" name="Picture 2">
             <a:extLst>
               <a:ext uri="{FF2B5EF4-FFF2-40B4-BE49-F238E27FC236}">
-                <a16:creationId xmlns:a16="http://schemas.microsoft.com/office/drawing/2014/main" id="{1C681D7A-97DA-4EA0-A5BF-6698FBC30029}"/>
+                <a16:creationId xmlns:a16="http://schemas.microsoft.com/office/drawing/2014/main" id="{79DFDAB8-A6B6-4357-BE75-DD131E5DC518}"/>
               </a:ext>
             </a:extLst>
           </p:cNvPr>
@@ -7849,8 +8359,8 @@
         </p:blipFill>
         <p:spPr>
           <a:xfrm>
-            <a:off x="5185403" y="1764817"/>
-            <a:ext cx="6777508" cy="3706053"/>
+            <a:off x="5148819" y="1771650"/>
+            <a:ext cx="6418051" cy="4072559"/>
           </a:xfrm>
           <a:prstGeom prst="rect">
             <a:avLst/>
@@ -7942,149 +8452,132 @@
         </p:nvSpPr>
         <p:spPr>
           <a:xfrm>
-            <a:off x="901148" y="1431236"/>
-            <a:ext cx="10164417" cy="4817164"/>
+            <a:off x="901149" y="1431236"/>
+            <a:ext cx="4717774" cy="4817164"/>
           </a:xfrm>
         </p:spPr>
         <p:txBody>
           <a:bodyPr>
-            <a:normAutofit lnSpcReduction="10000"/>
+            <a:normAutofit fontScale="85000" lnSpcReduction="20000"/>
           </a:bodyPr>
           <a:lstStyle/>
           <a:p>
-            <a:pPr marL="0" indent="0">
-              <a:buNone/>
-            </a:pPr>
-            <a:r>
-              <a:rPr lang="en-US" sz="2400" b="1" dirty="0">
-                <a:latin typeface="Arial" panose="020B0604020202020204" pitchFamily="34" charset="0"/>
-                <a:cs typeface="Arial" panose="020B0604020202020204" pitchFamily="34" charset="0"/>
-              </a:rPr>
-              <a:t>Model</a:t>
-            </a:r>
-          </a:p>
-          <a:p>
-            <a:pPr marL="0" indent="0">
-              <a:buNone/>
-            </a:pPr>
-            <a:r>
-              <a:rPr lang="en-US" sz="2200" dirty="0">
-                <a:latin typeface="Arial" panose="020B0604020202020204" pitchFamily="34" charset="0"/>
-                <a:cs typeface="Arial" panose="020B0604020202020204" pitchFamily="34" charset="0"/>
-              </a:rPr>
-              <a:t>CatBoost Regressor</a:t>
-            </a:r>
-          </a:p>
-          <a:p>
-            <a:pPr marL="0" indent="0">
-              <a:buNone/>
-            </a:pPr>
-            <a:r>
-              <a:rPr lang="en-US" sz="2400" b="1" dirty="0">
-                <a:latin typeface="Arial" panose="020B0604020202020204" pitchFamily="34" charset="0"/>
-                <a:cs typeface="Arial" panose="020B0604020202020204" pitchFamily="34" charset="0"/>
-              </a:rPr>
-              <a:t>Objective</a:t>
-            </a:r>
-          </a:p>
-          <a:p>
-            <a:pPr marL="0" indent="0">
-              <a:buNone/>
-            </a:pPr>
-            <a:r>
-              <a:rPr lang="en-US" sz="1900" dirty="0">
-                <a:latin typeface="Arial" panose="020B0604020202020204" pitchFamily="34" charset="0"/>
-                <a:cs typeface="Arial" panose="020B0604020202020204" pitchFamily="34" charset="0"/>
-              </a:rPr>
-              <a:t>Predict future parking violation intensity.</a:t>
-            </a:r>
-          </a:p>
-          <a:p>
-            <a:pPr marL="0" indent="0">
-              <a:buNone/>
-            </a:pPr>
-            <a:r>
-              <a:rPr lang="en-US" sz="2400" b="1" dirty="0">
-                <a:latin typeface="Arial" panose="020B0604020202020204" pitchFamily="34" charset="0"/>
-                <a:cs typeface="Arial" panose="020B0604020202020204" pitchFamily="34" charset="0"/>
-              </a:rPr>
-              <a:t>Features Used</a:t>
-            </a:r>
-          </a:p>
-          <a:p>
             <a:pPr>
-              <a:buFont typeface="Arial" panose="020B0604020202020204" pitchFamily="34" charset="0"/>
-              <a:buChar char="•"/>
+              <a:lnSpc>
+                <a:spcPct val="150000"/>
+              </a:lnSpc>
             </a:pPr>
             <a:r>
               <a:rPr lang="en-US" dirty="0">
                 <a:latin typeface="Arial" panose="020B0604020202020204" pitchFamily="34" charset="0"/>
                 <a:cs typeface="Arial" panose="020B0604020202020204" pitchFamily="34" charset="0"/>
               </a:rPr>
-              <a:t>Police Station </a:t>
+              <a:t>Predicts future parking violation intensity using historical spatial and temporal patterns.</a:t>
             </a:r>
           </a:p>
           <a:p>
             <a:pPr>
-              <a:buFont typeface="Arial" panose="020B0604020202020204" pitchFamily="34" charset="0"/>
-              <a:buChar char="•"/>
+              <a:lnSpc>
+                <a:spcPct val="150000"/>
+              </a:lnSpc>
             </a:pPr>
             <a:r>
               <a:rPr lang="en-US" dirty="0">
                 <a:latin typeface="Arial" panose="020B0604020202020204" pitchFamily="34" charset="0"/>
                 <a:cs typeface="Arial" panose="020B0604020202020204" pitchFamily="34" charset="0"/>
               </a:rPr>
-              <a:t>Junction </a:t>
-            </a:r>
-          </a:p>
-          <a:p>
-            <a:pPr>
-              <a:buFont typeface="Arial" panose="020B0604020202020204" pitchFamily="34" charset="0"/>
-              <a:buChar char="•"/>
-            </a:pPr>
+              <a:t>Utilizes a </a:t>
+            </a:r>
+            <a:r>
+              <a:rPr lang="en-US" dirty="0" err="1">
+                <a:latin typeface="Arial" panose="020B0604020202020204" pitchFamily="34" charset="0"/>
+                <a:cs typeface="Arial" panose="020B0604020202020204" pitchFamily="34" charset="0"/>
+              </a:rPr>
+              <a:t>CatBoost</a:t>
+            </a:r>
             <a:r>
               <a:rPr lang="en-US" dirty="0">
                 <a:latin typeface="Arial" panose="020B0604020202020204" pitchFamily="34" charset="0"/>
                 <a:cs typeface="Arial" panose="020B0604020202020204" pitchFamily="34" charset="0"/>
               </a:rPr>
-              <a:t>Day of Week </a:t>
+              <a:t> Regressor trained on location and time-based violation data. </a:t>
             </a:r>
           </a:p>
           <a:p>
             <a:pPr>
-              <a:buFont typeface="Arial" panose="020B0604020202020204" pitchFamily="34" charset="0"/>
-              <a:buChar char="•"/>
+              <a:lnSpc>
+                <a:spcPct val="150000"/>
+              </a:lnSpc>
             </a:pPr>
             <a:r>
               <a:rPr lang="en-US" dirty="0">
                 <a:latin typeface="Arial" panose="020B0604020202020204" pitchFamily="34" charset="0"/>
                 <a:cs typeface="Arial" panose="020B0604020202020204" pitchFamily="34" charset="0"/>
               </a:rPr>
-              <a:t>Hour of Day </a:t>
-            </a:r>
-          </a:p>
-          <a:p>
-            <a:pPr marL="0" indent="0">
-              <a:buNone/>
+              <a:t>Forecasts violation volume at hotspot locations before congestion escalates. </a:t>
+            </a:r>
+          </a:p>
+          <a:p>
+            <a:pPr>
+              <a:lnSpc>
+                <a:spcPct val="150000"/>
+              </a:lnSpc>
             </a:pPr>
             <a:r>
-              <a:rPr lang="en-US" sz="2400" b="1" dirty="0">
+              <a:rPr lang="en-US" dirty="0">
                 <a:latin typeface="Arial" panose="020B0604020202020204" pitchFamily="34" charset="0"/>
                 <a:cs typeface="Arial" panose="020B0604020202020204" pitchFamily="34" charset="0"/>
               </a:rPr>
-              <a:t>Result</a:t>
-            </a:r>
-          </a:p>
-          <a:p>
-            <a:pPr marL="0" indent="0">
-              <a:buNone/>
+              <a:t>Supports proactive officer deployment and targeted enforcement planning. </a:t>
+            </a:r>
+          </a:p>
+          <a:p>
+            <a:pPr>
+              <a:lnSpc>
+                <a:spcPct val="150000"/>
+              </a:lnSpc>
             </a:pPr>
             <a:r>
               <a:rPr lang="en-US" b="1" dirty="0">
                 <a:latin typeface="Arial" panose="020B0604020202020204" pitchFamily="34" charset="0"/>
                 <a:cs typeface="Arial" panose="020B0604020202020204" pitchFamily="34" charset="0"/>
               </a:rPr>
-              <a:t>MAE = 9.49</a:t>
+              <a:t>Key Inputs:</a:t>
+            </a:r>
+            <a:r>
+              <a:rPr lang="en-US" dirty="0">
+                <a:latin typeface="Arial" panose="020B0604020202020204" pitchFamily="34" charset="0"/>
+                <a:cs typeface="Arial" panose="020B0604020202020204" pitchFamily="34" charset="0"/>
+              </a:rPr>
+              <a:t> Police Station • Junction • Day of Week • Hour of Day</a:t>
+            </a:r>
+          </a:p>
+          <a:p>
+            <a:pPr>
+              <a:lnSpc>
+                <a:spcPct val="150000"/>
+              </a:lnSpc>
+            </a:pPr>
+            <a:r>
+              <a:rPr lang="en-US" b="1" dirty="0">
+                <a:latin typeface="Arial" panose="020B0604020202020204" pitchFamily="34" charset="0"/>
+                <a:cs typeface="Arial" panose="020B0604020202020204" pitchFamily="34" charset="0"/>
+              </a:rPr>
+              <a:t>Performance:</a:t>
+            </a:r>
+            <a:r>
+              <a:rPr lang="en-US" dirty="0">
+                <a:latin typeface="Arial" panose="020B0604020202020204" pitchFamily="34" charset="0"/>
+                <a:cs typeface="Arial" panose="020B0604020202020204" pitchFamily="34" charset="0"/>
+              </a:rPr>
+              <a:t> </a:t>
+            </a:r>
+            <a:r>
+              <a:rPr lang="en-US" b="1" dirty="0">
+                <a:latin typeface="Arial" panose="020B0604020202020204" pitchFamily="34" charset="0"/>
+                <a:cs typeface="Arial" panose="020B0604020202020204" pitchFamily="34" charset="0"/>
+              </a:rPr>
+              <a:t>MAE = 9.49 violations</a:t>
             </a:r>
             <a:endParaRPr lang="en-US" dirty="0">
               <a:latin typeface="Arial" panose="020B0604020202020204" pitchFamily="34" charset="0"/>
@@ -8123,8 +8616,8 @@
         </p:blipFill>
         <p:spPr>
           <a:xfrm>
-            <a:off x="5367130" y="1718810"/>
-            <a:ext cx="6535474" cy="4271174"/>
+            <a:off x="5777948" y="1770492"/>
+            <a:ext cx="5969729" cy="3901439"/>
           </a:xfrm>
           <a:prstGeom prst="rect">
             <a:avLst/>
@@ -8238,8 +8731,8 @@
         </p:nvSpPr>
         <p:spPr>
           <a:xfrm>
-            <a:off x="1470991" y="5047927"/>
-            <a:ext cx="8375374" cy="400110"/>
+            <a:off x="1470991" y="4970659"/>
+            <a:ext cx="8375374" cy="1880451"/>
           </a:xfrm>
           <a:prstGeom prst="rect">
             <a:avLst/>
@@ -8251,20 +8744,42 @@
           </a:bodyPr>
           <a:lstStyle/>
           <a:p>
-            <a:pPr algn="ctr"/>
-            <a:r>
-              <a:rPr lang="en-US" sz="2000" b="1" dirty="0">
-                <a:latin typeface="Arial" panose="020B0604020202020204" pitchFamily="34" charset="0"/>
-                <a:cs typeface="Arial" panose="020B0604020202020204" pitchFamily="34" charset="0"/>
-              </a:rPr>
-              <a:t>Benefit: </a:t>
-            </a:r>
-            <a:r>
-              <a:rPr lang="en-US" sz="2000" dirty="0">
-                <a:latin typeface="Arial" panose="020B0604020202020204" pitchFamily="34" charset="0"/>
-                <a:cs typeface="Arial" panose="020B0604020202020204" pitchFamily="34" charset="0"/>
-              </a:rPr>
-              <a:t>Supports targeted enforcement and repeat offender tracking.</a:t>
+            <a:pPr marL="342900" indent="-342900">
+              <a:lnSpc>
+                <a:spcPct val="150000"/>
+              </a:lnSpc>
+              <a:buFont typeface="Arial" panose="020B0604020202020204" pitchFamily="34" charset="0"/>
+              <a:buChar char="•"/>
+            </a:pPr>
+            <a:r>
+              <a:rPr lang="en-US" sz="2000" dirty="0"/>
+              <a:t>Detects vehicles with a history of frequent parking violations. </a:t>
+            </a:r>
+          </a:p>
+          <a:p>
+            <a:pPr marL="342900" indent="-342900">
+              <a:lnSpc>
+                <a:spcPct val="150000"/>
+              </a:lnSpc>
+              <a:buFont typeface="Arial" panose="020B0604020202020204" pitchFamily="34" charset="0"/>
+              <a:buChar char="•"/>
+            </a:pPr>
+            <a:r>
+              <a:rPr lang="en-US" sz="2000" dirty="0"/>
+              <a:t>Prioritizes high-risk repeat offenders for focused enforcement. </a:t>
+            </a:r>
+          </a:p>
+          <a:p>
+            <a:pPr marL="342900" indent="-342900">
+              <a:lnSpc>
+                <a:spcPct val="150000"/>
+              </a:lnSpc>
+              <a:buFont typeface="Arial" panose="020B0604020202020204" pitchFamily="34" charset="0"/>
+              <a:buChar char="•"/>
+            </a:pPr>
+            <a:r>
+              <a:rPr lang="en-US" sz="2000" dirty="0"/>
+              <a:t>Helps authorities prevent recurring congestion caused by habitual violators. </a:t>
             </a:r>
           </a:p>
         </p:txBody>
@@ -8359,6 +8874,82 @@
           </a:prstGeom>
         </p:spPr>
       </p:pic>
+      <p:sp>
+        <p:nvSpPr>
+          <p:cNvPr id="3" name="Rectangle 2">
+            <a:extLst>
+              <a:ext uri="{FF2B5EF4-FFF2-40B4-BE49-F238E27FC236}">
+                <a16:creationId xmlns:a16="http://schemas.microsoft.com/office/drawing/2014/main" id="{ECA37812-66D0-4C01-82DB-43F9102C5264}"/>
+              </a:ext>
+            </a:extLst>
+          </p:cNvPr>
+          <p:cNvSpPr/>
+          <p:nvPr/>
+        </p:nvSpPr>
+        <p:spPr>
+          <a:xfrm>
+            <a:off x="1457738" y="4338391"/>
+            <a:ext cx="8947149" cy="2343655"/>
+          </a:xfrm>
+          <a:prstGeom prst="rect">
+            <a:avLst/>
+          </a:prstGeom>
+        </p:spPr>
+        <p:txBody>
+          <a:bodyPr wrap="square">
+            <a:spAutoFit/>
+          </a:bodyPr>
+          <a:lstStyle/>
+          <a:p>
+            <a:pPr>
+              <a:lnSpc>
+                <a:spcPct val="150000"/>
+              </a:lnSpc>
+              <a:buFont typeface="Arial" panose="020B0604020202020204" pitchFamily="34" charset="0"/>
+              <a:buChar char="•"/>
+            </a:pPr>
+            <a:r>
+              <a:rPr lang="en-US" sz="2000" dirty="0">
+                <a:latin typeface="Arial" panose="020B0604020202020204" pitchFamily="34" charset="0"/>
+                <a:cs typeface="Arial" panose="020B0604020202020204" pitchFamily="34" charset="0"/>
+              </a:rPr>
+              <a:t>Prioritizes hotspot locations based on predicted violation risk and EPI scores. </a:t>
+            </a:r>
+          </a:p>
+          <a:p>
+            <a:pPr>
+              <a:lnSpc>
+                <a:spcPct val="150000"/>
+              </a:lnSpc>
+              <a:buFont typeface="Arial" panose="020B0604020202020204" pitchFamily="34" charset="0"/>
+              <a:buChar char="•"/>
+            </a:pPr>
+            <a:r>
+              <a:rPr lang="en-US" sz="2000" dirty="0">
+                <a:latin typeface="Arial" panose="020B0604020202020204" pitchFamily="34" charset="0"/>
+                <a:cs typeface="Arial" panose="020B0604020202020204" pitchFamily="34" charset="0"/>
+              </a:rPr>
+              <a:t>Recommends optimal deployment of traffic personnel and monitoring resources. </a:t>
+            </a:r>
+          </a:p>
+          <a:p>
+            <a:pPr>
+              <a:lnSpc>
+                <a:spcPct val="150000"/>
+              </a:lnSpc>
+              <a:buFont typeface="Arial" panose="020B0604020202020204" pitchFamily="34" charset="0"/>
+              <a:buChar char="•"/>
+            </a:pPr>
+            <a:r>
+              <a:rPr lang="en-US" sz="2000" dirty="0">
+                <a:latin typeface="Arial" panose="020B0604020202020204" pitchFamily="34" charset="0"/>
+                <a:cs typeface="Arial" panose="020B0604020202020204" pitchFamily="34" charset="0"/>
+              </a:rPr>
+              <a:t>Enables proactive enforcement to reduce parking-induced congestion and improve traffic flow. </a:t>
+            </a:r>
+          </a:p>
+        </p:txBody>
+      </p:sp>
     </p:spTree>
     <p:extLst>
       <p:ext uri="{BB962C8B-B14F-4D97-AF65-F5344CB8AC3E}">
